--- a/Figures_for_Paper/MCMC_plot.pptx
+++ b/Figures_for_Paper/MCMC_plot.pptx
@@ -104,6 +104,11 @@
       </a:defRPr>
     </a:lvl9pPr>
   </p:defaultTextStyle>
+  <p:extLst>
+    <p:ext uri="{EFAFB233-063F-42B5-8137-9DF3F51BA10A}">
+      <p15:sldGuideLst xmlns:p15="http://schemas.microsoft.com/office/powerpoint/2012/main"/>
+    </p:ext>
+  </p:extLst>
 </p:presentation>
 </file>
 
@@ -254,7 +259,7 @@
           <a:p>
             <a:fld id="{D7B59440-280B-4979-BB8D-AC0F401E8FAB}" type="datetimeFigureOut">
               <a:rPr lang="en-US" smtClean="0"/>
-              <a:t>5/19/2026</a:t>
+              <a:t>5/20/2026</a:t>
             </a:fld>
             <a:endParaRPr lang="en-US"/>
           </a:p>
@@ -452,7 +457,7 @@
           <a:p>
             <a:fld id="{D7B59440-280B-4979-BB8D-AC0F401E8FAB}" type="datetimeFigureOut">
               <a:rPr lang="en-US" smtClean="0"/>
-              <a:t>5/19/2026</a:t>
+              <a:t>5/20/2026</a:t>
             </a:fld>
             <a:endParaRPr lang="en-US"/>
           </a:p>
@@ -660,7 +665,7 @@
           <a:p>
             <a:fld id="{D7B59440-280B-4979-BB8D-AC0F401E8FAB}" type="datetimeFigureOut">
               <a:rPr lang="en-US" smtClean="0"/>
-              <a:t>5/19/2026</a:t>
+              <a:t>5/20/2026</a:t>
             </a:fld>
             <a:endParaRPr lang="en-US"/>
           </a:p>
@@ -858,7 +863,7 @@
           <a:p>
             <a:fld id="{D7B59440-280B-4979-BB8D-AC0F401E8FAB}" type="datetimeFigureOut">
               <a:rPr lang="en-US" smtClean="0"/>
-              <a:t>5/19/2026</a:t>
+              <a:t>5/20/2026</a:t>
             </a:fld>
             <a:endParaRPr lang="en-US"/>
           </a:p>
@@ -1133,7 +1138,7 @@
           <a:p>
             <a:fld id="{D7B59440-280B-4979-BB8D-AC0F401E8FAB}" type="datetimeFigureOut">
               <a:rPr lang="en-US" smtClean="0"/>
-              <a:t>5/19/2026</a:t>
+              <a:t>5/20/2026</a:t>
             </a:fld>
             <a:endParaRPr lang="en-US"/>
           </a:p>
@@ -1398,7 +1403,7 @@
           <a:p>
             <a:fld id="{D7B59440-280B-4979-BB8D-AC0F401E8FAB}" type="datetimeFigureOut">
               <a:rPr lang="en-US" smtClean="0"/>
-              <a:t>5/19/2026</a:t>
+              <a:t>5/20/2026</a:t>
             </a:fld>
             <a:endParaRPr lang="en-US"/>
           </a:p>
@@ -1810,7 +1815,7 @@
           <a:p>
             <a:fld id="{D7B59440-280B-4979-BB8D-AC0F401E8FAB}" type="datetimeFigureOut">
               <a:rPr lang="en-US" smtClean="0"/>
-              <a:t>5/19/2026</a:t>
+              <a:t>5/20/2026</a:t>
             </a:fld>
             <a:endParaRPr lang="en-US"/>
           </a:p>
@@ -1951,7 +1956,7 @@
           <a:p>
             <a:fld id="{D7B59440-280B-4979-BB8D-AC0F401E8FAB}" type="datetimeFigureOut">
               <a:rPr lang="en-US" smtClean="0"/>
-              <a:t>5/19/2026</a:t>
+              <a:t>5/20/2026</a:t>
             </a:fld>
             <a:endParaRPr lang="en-US"/>
           </a:p>
@@ -2064,7 +2069,7 @@
           <a:p>
             <a:fld id="{D7B59440-280B-4979-BB8D-AC0F401E8FAB}" type="datetimeFigureOut">
               <a:rPr lang="en-US" smtClean="0"/>
-              <a:t>5/19/2026</a:t>
+              <a:t>5/20/2026</a:t>
             </a:fld>
             <a:endParaRPr lang="en-US"/>
           </a:p>
@@ -2375,7 +2380,7 @@
           <a:p>
             <a:fld id="{D7B59440-280B-4979-BB8D-AC0F401E8FAB}" type="datetimeFigureOut">
               <a:rPr lang="en-US" smtClean="0"/>
-              <a:t>5/19/2026</a:t>
+              <a:t>5/20/2026</a:t>
             </a:fld>
             <a:endParaRPr lang="en-US"/>
           </a:p>
@@ -2663,7 +2668,7 @@
           <a:p>
             <a:fld id="{D7B59440-280B-4979-BB8D-AC0F401E8FAB}" type="datetimeFigureOut">
               <a:rPr lang="en-US" smtClean="0"/>
-              <a:t>5/19/2026</a:t>
+              <a:t>5/20/2026</a:t>
             </a:fld>
             <a:endParaRPr lang="en-US"/>
           </a:p>
@@ -2904,7 +2909,7 @@
           <a:p>
             <a:fld id="{D7B59440-280B-4979-BB8D-AC0F401E8FAB}" type="datetimeFigureOut">
               <a:rPr lang="en-US" smtClean="0"/>
-              <a:t>5/19/2026</a:t>
+              <a:t>5/20/2026</a:t>
             </a:fld>
             <a:endParaRPr lang="en-US"/>
           </a:p>
@@ -3323,10 +3328,10 @@
       </p:grpSpPr>
       <p:grpSp>
         <p:nvGrpSpPr>
-          <p:cNvPr id="28" name="Group 27">
-            <a:extLst>
-              <a:ext uri="{FF2B5EF4-FFF2-40B4-BE49-F238E27FC236}">
-                <a16:creationId xmlns:a16="http://schemas.microsoft.com/office/drawing/2014/main" id="{1F933DE3-AE86-DB89-6F7A-E65F9DEB6EC7}"/>
+          <p:cNvPr id="31" name="Group 30">
+            <a:extLst>
+              <a:ext uri="{FF2B5EF4-FFF2-40B4-BE49-F238E27FC236}">
+                <a16:creationId xmlns:a16="http://schemas.microsoft.com/office/drawing/2014/main" id="{2414E57A-F048-5DFD-FA41-9111368B08F3}"/>
               </a:ext>
             </a:extLst>
           </p:cNvPr>
@@ -3335,18 +3340,18 @@
         </p:nvGrpSpPr>
         <p:grpSpPr>
           <a:xfrm>
-            <a:off x="2927503" y="507805"/>
-            <a:ext cx="6640009" cy="5560963"/>
-            <a:chOff x="2946753" y="113169"/>
-            <a:chExt cx="6640009" cy="5560963"/>
+            <a:off x="2926080" y="507805"/>
+            <a:ext cx="6647242" cy="5545523"/>
+            <a:chOff x="2926080" y="507805"/>
+            <a:chExt cx="6647242" cy="5545523"/>
           </a:xfrm>
         </p:grpSpPr>
         <p:grpSp>
           <p:nvGrpSpPr>
-            <p:cNvPr id="20" name="Group 19">
+            <p:cNvPr id="10" name="Group 9">
               <a:extLst>
                 <a:ext uri="{FF2B5EF4-FFF2-40B4-BE49-F238E27FC236}">
-                  <a16:creationId xmlns:a16="http://schemas.microsoft.com/office/drawing/2014/main" id="{F4A986F8-77A2-CC29-6CED-D0B9E5F7F61B}"/>
+                  <a16:creationId xmlns:a16="http://schemas.microsoft.com/office/drawing/2014/main" id="{84A93276-B405-9F4A-3E1D-FE53159B8606}"/>
                 </a:ext>
               </a:extLst>
             </p:cNvPr>
@@ -3357,297 +3362,18 @@
           </p:nvGrpSpPr>
           <p:grpSpPr>
             <a:xfrm>
-              <a:off x="2946753" y="113169"/>
-              <a:ext cx="6640009" cy="3586013"/>
-              <a:chOff x="-2000632" y="250033"/>
-              <a:chExt cx="15333501" cy="8281032"/>
-            </a:xfrm>
-          </p:grpSpPr>
-          <p:grpSp>
-            <p:nvGrpSpPr>
-              <p:cNvPr id="10" name="Group 9">
-                <a:extLst>
-                  <a:ext uri="{FF2B5EF4-FFF2-40B4-BE49-F238E27FC236}">
-                    <a16:creationId xmlns:a16="http://schemas.microsoft.com/office/drawing/2014/main" id="{84A93276-B405-9F4A-3E1D-FE53159B8606}"/>
-                  </a:ext>
-                </a:extLst>
-              </p:cNvPr>
-              <p:cNvGrpSpPr>
-                <a:grpSpLocks noChangeAspect="1"/>
-              </p:cNvGrpSpPr>
-              <p:nvPr/>
-            </p:nvGrpSpPr>
-            <p:grpSpPr>
-              <a:xfrm>
-                <a:off x="885766" y="250033"/>
-                <a:ext cx="10420468" cy="4272534"/>
-                <a:chOff x="130851" y="0"/>
-                <a:chExt cx="12521474" cy="5133975"/>
-              </a:xfrm>
-            </p:grpSpPr>
-            <p:pic>
-              <p:nvPicPr>
-                <p:cNvPr id="5" name="Picture 4">
-                  <a:extLst>
-                    <a:ext uri="{FF2B5EF4-FFF2-40B4-BE49-F238E27FC236}">
-                      <a16:creationId xmlns:a16="http://schemas.microsoft.com/office/drawing/2014/main" id="{43E254D7-E56B-A6F6-D6F4-077E10D7EC70}"/>
-                    </a:ext>
-                  </a:extLst>
-                </p:cNvPr>
-                <p:cNvPicPr>
-                  <a:picLocks noChangeAspect="1"/>
-                </p:cNvPicPr>
-                <p:nvPr/>
-              </p:nvPicPr>
-              <p:blipFill>
-                <a:blip r:embed="rId2"/>
-                <a:stretch>
-                  <a:fillRect/>
-                </a:stretch>
-              </p:blipFill>
-              <p:spPr>
-                <a:xfrm>
-                  <a:off x="130851" y="0"/>
-                  <a:ext cx="4000500" cy="5133975"/>
-                </a:xfrm>
-                <a:prstGeom prst="rect">
-                  <a:avLst/>
-                </a:prstGeom>
-              </p:spPr>
-            </p:pic>
-            <p:pic>
-              <p:nvPicPr>
-                <p:cNvPr id="7" name="Picture 6">
-                  <a:extLst>
-                    <a:ext uri="{FF2B5EF4-FFF2-40B4-BE49-F238E27FC236}">
-                      <a16:creationId xmlns:a16="http://schemas.microsoft.com/office/drawing/2014/main" id="{AEF56447-BB90-2E3E-7E98-6FE89AB2BC6E}"/>
-                    </a:ext>
-                  </a:extLst>
-                </p:cNvPr>
-                <p:cNvPicPr>
-                  <a:picLocks noChangeAspect="1"/>
-                </p:cNvPicPr>
-                <p:nvPr/>
-              </p:nvPicPr>
-              <p:blipFill>
-                <a:blip r:embed="rId3"/>
-                <a:stretch>
-                  <a:fillRect/>
-                </a:stretch>
-              </p:blipFill>
-              <p:spPr>
-                <a:xfrm>
-                  <a:off x="4438650" y="0"/>
-                  <a:ext cx="3724275" cy="5133975"/>
-                </a:xfrm>
-                <a:prstGeom prst="rect">
-                  <a:avLst/>
-                </a:prstGeom>
-              </p:spPr>
-            </p:pic>
-            <p:pic>
-              <p:nvPicPr>
-                <p:cNvPr id="9" name="Picture 8">
-                  <a:extLst>
-                    <a:ext uri="{FF2B5EF4-FFF2-40B4-BE49-F238E27FC236}">
-                      <a16:creationId xmlns:a16="http://schemas.microsoft.com/office/drawing/2014/main" id="{E573E413-CB98-C891-5446-5003022FEA96}"/>
-                    </a:ext>
-                  </a:extLst>
-                </p:cNvPr>
-                <p:cNvPicPr>
-                  <a:picLocks noChangeAspect="1"/>
-                </p:cNvPicPr>
-                <p:nvPr/>
-              </p:nvPicPr>
-              <p:blipFill>
-                <a:blip r:embed="rId4"/>
-                <a:stretch>
-                  <a:fillRect/>
-                </a:stretch>
-              </p:blipFill>
-              <p:spPr>
-                <a:xfrm>
-                  <a:off x="8023175" y="0"/>
-                  <a:ext cx="4629150" cy="5114925"/>
-                </a:xfrm>
-                <a:prstGeom prst="rect">
-                  <a:avLst/>
-                </a:prstGeom>
-              </p:spPr>
-            </p:pic>
-          </p:grpSp>
-          <p:grpSp>
-            <p:nvGrpSpPr>
-              <p:cNvPr id="19" name="Group 18">
-                <a:extLst>
-                  <a:ext uri="{FF2B5EF4-FFF2-40B4-BE49-F238E27FC236}">
-                    <a16:creationId xmlns:a16="http://schemas.microsoft.com/office/drawing/2014/main" id="{98E4E38C-3186-A7A4-9B96-54FB295531B5}"/>
-                  </a:ext>
-                </a:extLst>
-              </p:cNvPr>
-              <p:cNvGrpSpPr>
-                <a:grpSpLocks noChangeAspect="1"/>
-              </p:cNvGrpSpPr>
-              <p:nvPr/>
-            </p:nvGrpSpPr>
-            <p:grpSpPr>
-              <a:xfrm>
-                <a:off x="-2000632" y="4606316"/>
-                <a:ext cx="15333501" cy="3924749"/>
-                <a:chOff x="-1905059" y="4568413"/>
-                <a:chExt cx="22240875" cy="5692754"/>
-              </a:xfrm>
-            </p:grpSpPr>
-            <p:pic>
-              <p:nvPicPr>
-                <p:cNvPr id="12" name="Picture 11">
-                  <a:extLst>
-                    <a:ext uri="{FF2B5EF4-FFF2-40B4-BE49-F238E27FC236}">
-                      <a16:creationId xmlns:a16="http://schemas.microsoft.com/office/drawing/2014/main" id="{F4E9A96E-40B1-F2E7-1DED-8FB267BCE05B}"/>
-                    </a:ext>
-                  </a:extLst>
-                </p:cNvPr>
-                <p:cNvPicPr>
-                  <a:picLocks noChangeAspect="1"/>
-                </p:cNvPicPr>
-                <p:nvPr/>
-              </p:nvPicPr>
-              <p:blipFill>
-                <a:blip r:embed="rId5"/>
-                <a:stretch>
-                  <a:fillRect/>
-                </a:stretch>
-              </p:blipFill>
-              <p:spPr>
-                <a:xfrm>
-                  <a:off x="-1905059" y="4593792"/>
-                  <a:ext cx="5581650" cy="5657850"/>
-                </a:xfrm>
-                <a:prstGeom prst="rect">
-                  <a:avLst/>
-                </a:prstGeom>
-              </p:spPr>
-            </p:pic>
-            <p:pic>
-              <p:nvPicPr>
-                <p:cNvPr id="14" name="Picture 13">
-                  <a:extLst>
-                    <a:ext uri="{FF2B5EF4-FFF2-40B4-BE49-F238E27FC236}">
-                      <a16:creationId xmlns:a16="http://schemas.microsoft.com/office/drawing/2014/main" id="{CB538AFB-C2BB-39BA-2D92-D235E9048B70}"/>
-                    </a:ext>
-                  </a:extLst>
-                </p:cNvPr>
-                <p:cNvPicPr>
-                  <a:picLocks noChangeAspect="1"/>
-                </p:cNvPicPr>
-                <p:nvPr/>
-              </p:nvPicPr>
-              <p:blipFill>
-                <a:blip r:embed="rId6"/>
-                <a:stretch>
-                  <a:fillRect/>
-                </a:stretch>
-              </p:blipFill>
-              <p:spPr>
-                <a:xfrm>
-                  <a:off x="3676591" y="4584267"/>
-                  <a:ext cx="5543550" cy="5676900"/>
-                </a:xfrm>
-                <a:prstGeom prst="rect">
-                  <a:avLst/>
-                </a:prstGeom>
-              </p:spPr>
-            </p:pic>
-            <p:pic>
-              <p:nvPicPr>
-                <p:cNvPr id="16" name="Picture 15">
-                  <a:extLst>
-                    <a:ext uri="{FF2B5EF4-FFF2-40B4-BE49-F238E27FC236}">
-                      <a16:creationId xmlns:a16="http://schemas.microsoft.com/office/drawing/2014/main" id="{E1A56888-B1CE-2B99-C326-70E907D5027E}"/>
-                    </a:ext>
-                  </a:extLst>
-                </p:cNvPr>
-                <p:cNvPicPr>
-                  <a:picLocks noChangeAspect="1"/>
-                </p:cNvPicPr>
-                <p:nvPr/>
-              </p:nvPicPr>
-              <p:blipFill>
-                <a:blip r:embed="rId7"/>
-                <a:stretch>
-                  <a:fillRect/>
-                </a:stretch>
-              </p:blipFill>
-              <p:spPr>
-                <a:xfrm>
-                  <a:off x="9201091" y="4568413"/>
-                  <a:ext cx="5600700" cy="5676900"/>
-                </a:xfrm>
-                <a:prstGeom prst="rect">
-                  <a:avLst/>
-                </a:prstGeom>
-              </p:spPr>
-            </p:pic>
-            <p:pic>
-              <p:nvPicPr>
-                <p:cNvPr id="18" name="Picture 17">
-                  <a:extLst>
-                    <a:ext uri="{FF2B5EF4-FFF2-40B4-BE49-F238E27FC236}">
-                      <a16:creationId xmlns:a16="http://schemas.microsoft.com/office/drawing/2014/main" id="{95856077-C708-AC52-53CB-F76B5930C924}"/>
-                    </a:ext>
-                  </a:extLst>
-                </p:cNvPr>
-                <p:cNvPicPr>
-                  <a:picLocks noChangeAspect="1"/>
-                </p:cNvPicPr>
-                <p:nvPr/>
-              </p:nvPicPr>
-              <p:blipFill>
-                <a:blip r:embed="rId8"/>
-                <a:stretch>
-                  <a:fillRect/>
-                </a:stretch>
-              </p:blipFill>
-              <p:spPr>
-                <a:xfrm>
-                  <a:off x="14801791" y="4584267"/>
-                  <a:ext cx="5534025" cy="5657850"/>
-                </a:xfrm>
-                <a:prstGeom prst="rect">
-                  <a:avLst/>
-                </a:prstGeom>
-              </p:spPr>
-            </p:pic>
-          </p:grpSp>
-        </p:grpSp>
-        <p:grpSp>
-          <p:nvGrpSpPr>
-            <p:cNvPr id="27" name="Group 26">
-              <a:extLst>
-                <a:ext uri="{FF2B5EF4-FFF2-40B4-BE49-F238E27FC236}">
-                  <a16:creationId xmlns:a16="http://schemas.microsoft.com/office/drawing/2014/main" id="{8795E675-D89E-E9B0-7447-64C032599B21}"/>
-                </a:ext>
-              </a:extLst>
-            </p:cNvPr>
-            <p:cNvGrpSpPr>
-              <a:grpSpLocks noChangeAspect="1"/>
-            </p:cNvGrpSpPr>
-            <p:nvPr/>
-          </p:nvGrpSpPr>
-          <p:grpSpPr>
-            <a:xfrm>
-              <a:off x="3692946" y="3827044"/>
-              <a:ext cx="5454488" cy="1847088"/>
-              <a:chOff x="-1488406" y="4019550"/>
-              <a:chExt cx="16764000" cy="5676900"/>
+              <a:off x="4177427" y="507805"/>
+              <a:ext cx="4512473" cy="1850176"/>
+              <a:chOff x="130851" y="0"/>
+              <a:chExt cx="12521474" cy="5133975"/>
             </a:xfrm>
           </p:grpSpPr>
           <p:pic>
             <p:nvPicPr>
-              <p:cNvPr id="22" name="Picture 21">
+              <p:cNvPr id="5" name="Picture 4">
                 <a:extLst>
                   <a:ext uri="{FF2B5EF4-FFF2-40B4-BE49-F238E27FC236}">
-                    <a16:creationId xmlns:a16="http://schemas.microsoft.com/office/drawing/2014/main" id="{31BEF85F-E601-5244-C012-EE9217A50708}"/>
+                    <a16:creationId xmlns:a16="http://schemas.microsoft.com/office/drawing/2014/main" id="{43E254D7-E56B-A6F6-D6F4-077E10D7EC70}"/>
                   </a:ext>
                 </a:extLst>
               </p:cNvPr>
@@ -3657,15 +3383,15 @@
               <p:nvPr/>
             </p:nvPicPr>
             <p:blipFill>
-              <a:blip r:embed="rId9"/>
+              <a:blip r:embed="rId2"/>
               <a:stretch>
                 <a:fillRect/>
               </a:stretch>
             </p:blipFill>
             <p:spPr>
               <a:xfrm>
-                <a:off x="-1488406" y="4019550"/>
-                <a:ext cx="5543550" cy="5676900"/>
+                <a:off x="130851" y="0"/>
+                <a:ext cx="4000500" cy="5133975"/>
               </a:xfrm>
               <a:prstGeom prst="rect">
                 <a:avLst/>
@@ -3674,10 +3400,10 @@
           </p:pic>
           <p:pic>
             <p:nvPicPr>
-              <p:cNvPr id="24" name="Picture 23">
+              <p:cNvPr id="7" name="Picture 6">
                 <a:extLst>
                   <a:ext uri="{FF2B5EF4-FFF2-40B4-BE49-F238E27FC236}">
-                    <a16:creationId xmlns:a16="http://schemas.microsoft.com/office/drawing/2014/main" id="{D7EA767C-B5F1-578B-51EF-9BDDE8A04464}"/>
+                    <a16:creationId xmlns:a16="http://schemas.microsoft.com/office/drawing/2014/main" id="{AEF56447-BB90-2E3E-7E98-6FE89AB2BC6E}"/>
                   </a:ext>
                 </a:extLst>
               </p:cNvPr>
@@ -3687,15 +3413,15 @@
               <p:nvPr/>
             </p:nvPicPr>
             <p:blipFill>
-              <a:blip r:embed="rId10"/>
+              <a:blip r:embed="rId3"/>
               <a:stretch>
                 <a:fillRect/>
               </a:stretch>
             </p:blipFill>
             <p:spPr>
               <a:xfrm>
-                <a:off x="4055144" y="4019550"/>
-                <a:ext cx="5543550" cy="5676900"/>
+                <a:off x="4438650" y="0"/>
+                <a:ext cx="3724275" cy="5133975"/>
               </a:xfrm>
               <a:prstGeom prst="rect">
                 <a:avLst/>
@@ -3704,10 +3430,10 @@
           </p:pic>
           <p:pic>
             <p:nvPicPr>
-              <p:cNvPr id="26" name="Picture 25">
+              <p:cNvPr id="9" name="Picture 8">
                 <a:extLst>
                   <a:ext uri="{FF2B5EF4-FFF2-40B4-BE49-F238E27FC236}">
-                    <a16:creationId xmlns:a16="http://schemas.microsoft.com/office/drawing/2014/main" id="{F509A7F2-A690-62AA-CD31-3AC3FD4B2136}"/>
+                    <a16:creationId xmlns:a16="http://schemas.microsoft.com/office/drawing/2014/main" id="{E573E413-CB98-C891-5446-5003022FEA96}"/>
                   </a:ext>
                 </a:extLst>
               </p:cNvPr>
@@ -3717,15 +3443,15 @@
               <p:nvPr/>
             </p:nvPicPr>
             <p:blipFill>
-              <a:blip r:embed="rId11"/>
+              <a:blip r:embed="rId4"/>
               <a:stretch>
                 <a:fillRect/>
               </a:stretch>
             </p:blipFill>
             <p:spPr>
               <a:xfrm>
-                <a:off x="9598694" y="4019550"/>
-                <a:ext cx="5676900" cy="5676900"/>
+                <a:off x="8023175" y="0"/>
+                <a:ext cx="4629150" cy="5114925"/>
               </a:xfrm>
               <a:prstGeom prst="rect">
                 <a:avLst/>
@@ -3733,6 +3459,216 @@
             </p:spPr>
           </p:pic>
         </p:grpSp>
+        <p:pic>
+          <p:nvPicPr>
+            <p:cNvPr id="3" name="Picture 2">
+              <a:extLst>
+                <a:ext uri="{FF2B5EF4-FFF2-40B4-BE49-F238E27FC236}">
+                  <a16:creationId xmlns:a16="http://schemas.microsoft.com/office/drawing/2014/main" id="{491EFB96-C99F-F528-F1F1-9BE0D9FB17D5}"/>
+                </a:ext>
+              </a:extLst>
+            </p:cNvPr>
+            <p:cNvPicPr>
+              <a:picLocks noChangeAspect="1"/>
+            </p:cNvPicPr>
+            <p:nvPr/>
+          </p:nvPicPr>
+          <p:blipFill>
+            <a:blip r:embed="rId5"/>
+            <a:stretch>
+              <a:fillRect/>
+            </a:stretch>
+          </p:blipFill>
+          <p:spPr>
+            <a:xfrm>
+              <a:off x="2926080" y="2404872"/>
+              <a:ext cx="1668857" cy="1691640"/>
+            </a:xfrm>
+            <a:prstGeom prst="rect">
+              <a:avLst/>
+            </a:prstGeom>
+          </p:spPr>
+        </p:pic>
+        <p:pic>
+          <p:nvPicPr>
+            <p:cNvPr id="6" name="Picture 5">
+              <a:extLst>
+                <a:ext uri="{FF2B5EF4-FFF2-40B4-BE49-F238E27FC236}">
+                  <a16:creationId xmlns:a16="http://schemas.microsoft.com/office/drawing/2014/main" id="{AF3DA541-EC7D-F7F0-8F9B-63E6BB313124}"/>
+                </a:ext>
+              </a:extLst>
+            </p:cNvPr>
+            <p:cNvPicPr>
+              <a:picLocks noChangeAspect="1"/>
+            </p:cNvPicPr>
+            <p:nvPr/>
+          </p:nvPicPr>
+          <p:blipFill>
+            <a:blip r:embed="rId6"/>
+            <a:stretch>
+              <a:fillRect/>
+            </a:stretch>
+          </p:blipFill>
+          <p:spPr>
+            <a:xfrm>
+              <a:off x="4590288" y="2404872"/>
+              <a:ext cx="1651903" cy="1691640"/>
+            </a:xfrm>
+            <a:prstGeom prst="rect">
+              <a:avLst/>
+            </a:prstGeom>
+          </p:spPr>
+        </p:pic>
+        <p:pic>
+          <p:nvPicPr>
+            <p:cNvPr id="11" name="Picture 10">
+              <a:extLst>
+                <a:ext uri="{FF2B5EF4-FFF2-40B4-BE49-F238E27FC236}">
+                  <a16:creationId xmlns:a16="http://schemas.microsoft.com/office/drawing/2014/main" id="{A6658D9D-13C8-7BE6-8155-C978010EBA93}"/>
+                </a:ext>
+              </a:extLst>
+            </p:cNvPr>
+            <p:cNvPicPr>
+              <a:picLocks noChangeAspect="1"/>
+            </p:cNvPicPr>
+            <p:nvPr/>
+          </p:nvPicPr>
+          <p:blipFill>
+            <a:blip r:embed="rId7"/>
+            <a:stretch>
+              <a:fillRect/>
+            </a:stretch>
+          </p:blipFill>
+          <p:spPr>
+            <a:xfrm>
+              <a:off x="6245352" y="2404872"/>
+              <a:ext cx="1668933" cy="1691640"/>
+            </a:xfrm>
+            <a:prstGeom prst="rect">
+              <a:avLst/>
+            </a:prstGeom>
+          </p:spPr>
+        </p:pic>
+        <p:pic>
+          <p:nvPicPr>
+            <p:cNvPr id="15" name="Picture 14">
+              <a:extLst>
+                <a:ext uri="{FF2B5EF4-FFF2-40B4-BE49-F238E27FC236}">
+                  <a16:creationId xmlns:a16="http://schemas.microsoft.com/office/drawing/2014/main" id="{BED0070D-EE1D-05D0-B6F8-26F4815C437C}"/>
+                </a:ext>
+              </a:extLst>
+            </p:cNvPr>
+            <p:cNvPicPr>
+              <a:picLocks noChangeAspect="1"/>
+            </p:cNvPicPr>
+            <p:nvPr/>
+          </p:nvPicPr>
+          <p:blipFill>
+            <a:blip r:embed="rId8"/>
+            <a:stretch>
+              <a:fillRect/>
+            </a:stretch>
+          </p:blipFill>
+          <p:spPr>
+            <a:xfrm>
+              <a:off x="7918704" y="2404872"/>
+              <a:ext cx="1654618" cy="1691640"/>
+            </a:xfrm>
+            <a:prstGeom prst="rect">
+              <a:avLst/>
+            </a:prstGeom>
+          </p:spPr>
+        </p:pic>
+        <p:pic>
+          <p:nvPicPr>
+            <p:cNvPr id="21" name="Picture 20">
+              <a:extLst>
+                <a:ext uri="{FF2B5EF4-FFF2-40B4-BE49-F238E27FC236}">
+                  <a16:creationId xmlns:a16="http://schemas.microsoft.com/office/drawing/2014/main" id="{70C66036-F182-1F4D-3DFB-7092EF47FF86}"/>
+                </a:ext>
+              </a:extLst>
+            </p:cNvPr>
+            <p:cNvPicPr>
+              <a:picLocks noChangeAspect="1"/>
+            </p:cNvPicPr>
+            <p:nvPr/>
+          </p:nvPicPr>
+          <p:blipFill>
+            <a:blip r:embed="rId9"/>
+            <a:stretch>
+              <a:fillRect/>
+            </a:stretch>
+          </p:blipFill>
+          <p:spPr>
+            <a:xfrm>
+              <a:off x="3675888" y="4224528"/>
+              <a:ext cx="1785842" cy="1828800"/>
+            </a:xfrm>
+            <a:prstGeom prst="rect">
+              <a:avLst/>
+            </a:prstGeom>
+          </p:spPr>
+        </p:pic>
+        <p:pic>
+          <p:nvPicPr>
+            <p:cNvPr id="25" name="Picture 24">
+              <a:extLst>
+                <a:ext uri="{FF2B5EF4-FFF2-40B4-BE49-F238E27FC236}">
+                  <a16:creationId xmlns:a16="http://schemas.microsoft.com/office/drawing/2014/main" id="{DD58DA02-067F-71D6-93DA-2E82B4BF5DDB}"/>
+                </a:ext>
+              </a:extLst>
+            </p:cNvPr>
+            <p:cNvPicPr>
+              <a:picLocks noChangeAspect="1"/>
+            </p:cNvPicPr>
+            <p:nvPr/>
+          </p:nvPicPr>
+          <p:blipFill>
+            <a:blip r:embed="rId10"/>
+            <a:stretch>
+              <a:fillRect/>
+            </a:stretch>
+          </p:blipFill>
+          <p:spPr>
+            <a:xfrm>
+              <a:off x="5486400" y="4224528"/>
+              <a:ext cx="1785842" cy="1828800"/>
+            </a:xfrm>
+            <a:prstGeom prst="rect">
+              <a:avLst/>
+            </a:prstGeom>
+          </p:spPr>
+        </p:pic>
+        <p:pic>
+          <p:nvPicPr>
+            <p:cNvPr id="30" name="Picture 29">
+              <a:extLst>
+                <a:ext uri="{FF2B5EF4-FFF2-40B4-BE49-F238E27FC236}">
+                  <a16:creationId xmlns:a16="http://schemas.microsoft.com/office/drawing/2014/main" id="{3760F2E0-0342-FFCF-975C-1B921D6A2B66}"/>
+                </a:ext>
+              </a:extLst>
+            </p:cNvPr>
+            <p:cNvPicPr>
+              <a:picLocks noChangeAspect="1"/>
+            </p:cNvPicPr>
+            <p:nvPr/>
+          </p:nvPicPr>
+          <p:blipFill>
+            <a:blip r:embed="rId11"/>
+            <a:stretch>
+              <a:fillRect/>
+            </a:stretch>
+          </p:blipFill>
+          <p:spPr>
+            <a:xfrm>
+              <a:off x="7278624" y="4224528"/>
+              <a:ext cx="1828800" cy="1828800"/>
+            </a:xfrm>
+            <a:prstGeom prst="rect">
+              <a:avLst/>
+            </a:prstGeom>
+          </p:spPr>
+        </p:pic>
       </p:grpSp>
     </p:spTree>
     <p:extLst>

--- a/Figures_for_Paper/MCMC_plot.pptx
+++ b/Figures_for_Paper/MCMC_plot.pptx
@@ -259,7 +259,7 @@
           <a:p>
             <a:fld id="{D7B59440-280B-4979-BB8D-AC0F401E8FAB}" type="datetimeFigureOut">
               <a:rPr lang="en-US" smtClean="0"/>
-              <a:t>5/20/2026</a:t>
+              <a:t>5/21/2026</a:t>
             </a:fld>
             <a:endParaRPr lang="en-US"/>
           </a:p>
@@ -457,7 +457,7 @@
           <a:p>
             <a:fld id="{D7B59440-280B-4979-BB8D-AC0F401E8FAB}" type="datetimeFigureOut">
               <a:rPr lang="en-US" smtClean="0"/>
-              <a:t>5/20/2026</a:t>
+              <a:t>5/21/2026</a:t>
             </a:fld>
             <a:endParaRPr lang="en-US"/>
           </a:p>
@@ -665,7 +665,7 @@
           <a:p>
             <a:fld id="{D7B59440-280B-4979-BB8D-AC0F401E8FAB}" type="datetimeFigureOut">
               <a:rPr lang="en-US" smtClean="0"/>
-              <a:t>5/20/2026</a:t>
+              <a:t>5/21/2026</a:t>
             </a:fld>
             <a:endParaRPr lang="en-US"/>
           </a:p>
@@ -863,7 +863,7 @@
           <a:p>
             <a:fld id="{D7B59440-280B-4979-BB8D-AC0F401E8FAB}" type="datetimeFigureOut">
               <a:rPr lang="en-US" smtClean="0"/>
-              <a:t>5/20/2026</a:t>
+              <a:t>5/21/2026</a:t>
             </a:fld>
             <a:endParaRPr lang="en-US"/>
           </a:p>
@@ -1138,7 +1138,7 @@
           <a:p>
             <a:fld id="{D7B59440-280B-4979-BB8D-AC0F401E8FAB}" type="datetimeFigureOut">
               <a:rPr lang="en-US" smtClean="0"/>
-              <a:t>5/20/2026</a:t>
+              <a:t>5/21/2026</a:t>
             </a:fld>
             <a:endParaRPr lang="en-US"/>
           </a:p>
@@ -1403,7 +1403,7 @@
           <a:p>
             <a:fld id="{D7B59440-280B-4979-BB8D-AC0F401E8FAB}" type="datetimeFigureOut">
               <a:rPr lang="en-US" smtClean="0"/>
-              <a:t>5/20/2026</a:t>
+              <a:t>5/21/2026</a:t>
             </a:fld>
             <a:endParaRPr lang="en-US"/>
           </a:p>
@@ -1815,7 +1815,7 @@
           <a:p>
             <a:fld id="{D7B59440-280B-4979-BB8D-AC0F401E8FAB}" type="datetimeFigureOut">
               <a:rPr lang="en-US" smtClean="0"/>
-              <a:t>5/20/2026</a:t>
+              <a:t>5/21/2026</a:t>
             </a:fld>
             <a:endParaRPr lang="en-US"/>
           </a:p>
@@ -1956,7 +1956,7 @@
           <a:p>
             <a:fld id="{D7B59440-280B-4979-BB8D-AC0F401E8FAB}" type="datetimeFigureOut">
               <a:rPr lang="en-US" smtClean="0"/>
-              <a:t>5/20/2026</a:t>
+              <a:t>5/21/2026</a:t>
             </a:fld>
             <a:endParaRPr lang="en-US"/>
           </a:p>
@@ -2069,7 +2069,7 @@
           <a:p>
             <a:fld id="{D7B59440-280B-4979-BB8D-AC0F401E8FAB}" type="datetimeFigureOut">
               <a:rPr lang="en-US" smtClean="0"/>
-              <a:t>5/20/2026</a:t>
+              <a:t>5/21/2026</a:t>
             </a:fld>
             <a:endParaRPr lang="en-US"/>
           </a:p>
@@ -2380,7 +2380,7 @@
           <a:p>
             <a:fld id="{D7B59440-280B-4979-BB8D-AC0F401E8FAB}" type="datetimeFigureOut">
               <a:rPr lang="en-US" smtClean="0"/>
-              <a:t>5/20/2026</a:t>
+              <a:t>5/21/2026</a:t>
             </a:fld>
             <a:endParaRPr lang="en-US"/>
           </a:p>
@@ -2668,7 +2668,7 @@
           <a:p>
             <a:fld id="{D7B59440-280B-4979-BB8D-AC0F401E8FAB}" type="datetimeFigureOut">
               <a:rPr lang="en-US" smtClean="0"/>
-              <a:t>5/20/2026</a:t>
+              <a:t>5/21/2026</a:t>
             </a:fld>
             <a:endParaRPr lang="en-US"/>
           </a:p>
@@ -2909,7 +2909,7 @@
           <a:p>
             <a:fld id="{D7B59440-280B-4979-BB8D-AC0F401E8FAB}" type="datetimeFigureOut">
               <a:rPr lang="en-US" smtClean="0"/>
-              <a:t>5/20/2026</a:t>
+              <a:t>5/21/2026</a:t>
             </a:fld>
             <a:endParaRPr lang="en-US"/>
           </a:p>
@@ -3328,10 +3328,10 @@
       </p:grpSpPr>
       <p:grpSp>
         <p:nvGrpSpPr>
-          <p:cNvPr id="31" name="Group 30">
-            <a:extLst>
-              <a:ext uri="{FF2B5EF4-FFF2-40B4-BE49-F238E27FC236}">
-                <a16:creationId xmlns:a16="http://schemas.microsoft.com/office/drawing/2014/main" id="{2414E57A-F048-5DFD-FA41-9111368B08F3}"/>
+          <p:cNvPr id="2" name="Group 1">
+            <a:extLst>
+              <a:ext uri="{FF2B5EF4-FFF2-40B4-BE49-F238E27FC236}">
+                <a16:creationId xmlns:a16="http://schemas.microsoft.com/office/drawing/2014/main" id="{CBC9DF18-3F5E-BCB8-C84B-58F75CA8CA3B}"/>
               </a:ext>
             </a:extLst>
           </p:cNvPr>
@@ -3341,9 +3341,9 @@
         <p:grpSpPr>
           <a:xfrm>
             <a:off x="2926080" y="507805"/>
-            <a:ext cx="6647242" cy="5545523"/>
+            <a:ext cx="6647242" cy="3588707"/>
             <a:chOff x="2926080" y="507805"/>
-            <a:chExt cx="6647242" cy="5545523"/>
+            <a:chExt cx="6647242" cy="3588707"/>
           </a:xfrm>
         </p:grpSpPr>
         <p:grpSp>
@@ -3579,12 +3579,33 @@
             </a:prstGeom>
           </p:spPr>
         </p:pic>
+      </p:grpSp>
+      <p:grpSp>
+        <p:nvGrpSpPr>
+          <p:cNvPr id="17" name="Group 16">
+            <a:extLst>
+              <a:ext uri="{FF2B5EF4-FFF2-40B4-BE49-F238E27FC236}">
+                <a16:creationId xmlns:a16="http://schemas.microsoft.com/office/drawing/2014/main" id="{BA3AA70E-B5EF-BB17-54C0-20BC537F8828}"/>
+              </a:ext>
+            </a:extLst>
+          </p:cNvPr>
+          <p:cNvGrpSpPr/>
+          <p:nvPr/>
+        </p:nvGrpSpPr>
+        <p:grpSpPr>
+          <a:xfrm>
+            <a:off x="3341003" y="4479720"/>
+            <a:ext cx="5679372" cy="1938731"/>
+            <a:chOff x="3341003" y="4479720"/>
+            <a:chExt cx="5679372" cy="1938731"/>
+          </a:xfrm>
+        </p:grpSpPr>
         <p:pic>
           <p:nvPicPr>
-            <p:cNvPr id="21" name="Picture 20">
+            <p:cNvPr id="8" name="Picture 7">
               <a:extLst>
                 <a:ext uri="{FF2B5EF4-FFF2-40B4-BE49-F238E27FC236}">
-                  <a16:creationId xmlns:a16="http://schemas.microsoft.com/office/drawing/2014/main" id="{70C66036-F182-1F4D-3DFB-7092EF47FF86}"/>
+                  <a16:creationId xmlns:a16="http://schemas.microsoft.com/office/drawing/2014/main" id="{EBA08266-8F86-D7D7-65AE-5B168416170F}"/>
                 </a:ext>
               </a:extLst>
             </p:cNvPr>
@@ -3601,8 +3622,8 @@
           </p:blipFill>
           <p:spPr>
             <a:xfrm>
-              <a:off x="3675888" y="4224528"/>
-              <a:ext cx="1785842" cy="1828800"/>
+              <a:off x="3341003" y="4479720"/>
+              <a:ext cx="1893190" cy="1938731"/>
             </a:xfrm>
             <a:prstGeom prst="rect">
               <a:avLst/>
@@ -3611,10 +3632,10 @@
         </p:pic>
         <p:pic>
           <p:nvPicPr>
-            <p:cNvPr id="25" name="Picture 24">
+            <p:cNvPr id="13" name="Picture 12">
               <a:extLst>
                 <a:ext uri="{FF2B5EF4-FFF2-40B4-BE49-F238E27FC236}">
-                  <a16:creationId xmlns:a16="http://schemas.microsoft.com/office/drawing/2014/main" id="{DD58DA02-067F-71D6-93DA-2E82B4BF5DDB}"/>
+                  <a16:creationId xmlns:a16="http://schemas.microsoft.com/office/drawing/2014/main" id="{6BE08422-8E1F-A036-68F5-14105B51732F}"/>
                 </a:ext>
               </a:extLst>
             </p:cNvPr>
@@ -3631,8 +3652,8 @@
           </p:blipFill>
           <p:spPr>
             <a:xfrm>
-              <a:off x="5486400" y="4224528"/>
-              <a:ext cx="1785842" cy="1828800"/>
+              <a:off x="5234193" y="4479720"/>
+              <a:ext cx="1892992" cy="1938528"/>
             </a:xfrm>
             <a:prstGeom prst="rect">
               <a:avLst/>
@@ -3641,10 +3662,10 @@
         </p:pic>
         <p:pic>
           <p:nvPicPr>
-            <p:cNvPr id="30" name="Picture 29">
+            <p:cNvPr id="16" name="Picture 15">
               <a:extLst>
                 <a:ext uri="{FF2B5EF4-FFF2-40B4-BE49-F238E27FC236}">
-                  <a16:creationId xmlns:a16="http://schemas.microsoft.com/office/drawing/2014/main" id="{3760F2E0-0342-FFCF-975C-1B921D6A2B66}"/>
+                  <a16:creationId xmlns:a16="http://schemas.microsoft.com/office/drawing/2014/main" id="{178E0A06-9E59-9B10-EC90-F0F7A679674D}"/>
                 </a:ext>
               </a:extLst>
             </p:cNvPr>
@@ -3661,8 +3682,8 @@
           </p:blipFill>
           <p:spPr>
             <a:xfrm>
-              <a:off x="7278624" y="4224528"/>
-              <a:ext cx="1828800" cy="1828800"/>
+              <a:off x="7127383" y="4479720"/>
+              <a:ext cx="1892992" cy="1938528"/>
             </a:xfrm>
             <a:prstGeom prst="rect">
               <a:avLst/>
